--- a/data-eng/decks/w3d1s0.pptx
+++ b/data-eng/decks/w3d1s0.pptx
@@ -10305,7 +10305,7 @@
                 <a:ea typeface="Pretendard"/>
                 <a:cs typeface="Pretendard"/>
               </a:rPr>
-              <a:t>make_orders.py 만 보이면 끝 — 실습 1H 2단계부터</a:t>
+              <a:t>make_orders.py(와 .py 코드)만 남으면 끝 — 실습 1H 2단계부터</a:t>
             </a:r>
           </a:p>
         </p:txBody>

--- a/data-eng/decks/w3d1s0.pptx
+++ b/data-eng/decks/w3d1s0.pptx
@@ -4930,7 +4930,7 @@
                 <a:ea typeface="Pretendard"/>
                 <a:cs typeface="Pretendard"/>
               </a:rPr>
-              <a:t>1 버전·별칭</a:t>
+              <a:t>1. 버전·별칭</a:t>
             </a:r>
           </a:p>
         </p:txBody>
@@ -5076,7 +5076,7 @@
                 <a:ea typeface="Pretendard"/>
                 <a:cs typeface="Pretendard"/>
               </a:rPr>
-              <a:t>2 새 venv</a:t>
+              <a:t>2. 새 venv</a:t>
             </a:r>
           </a:p>
         </p:txBody>
@@ -5222,7 +5222,7 @@
                 <a:ea typeface="Pretendard"/>
                 <a:cs typeface="Pretendard"/>
               </a:rPr>
-              <a:t>3 설치</a:t>
+              <a:t>3. 설치</a:t>
             </a:r>
           </a:p>
         </p:txBody>
@@ -5368,7 +5368,7 @@
                 <a:ea typeface="Pretendard"/>
                 <a:cs typeface="Pretendard"/>
               </a:rPr>
-              <a:t>4 디스크</a:t>
+              <a:t>4. 디스크</a:t>
             </a:r>
           </a:p>
         </p:txBody>
@@ -5514,7 +5514,7 @@
                 <a:ea typeface="Pretendard"/>
                 <a:cs typeface="Pretendard"/>
               </a:rPr>
-              <a:t>5 재설정</a:t>
+              <a:t>5. 재설정</a:t>
             </a:r>
           </a:p>
         </p:txBody>
